--- a/lectures/Heap_Operations_and_Heapsort.pptx
+++ b/lectures/Heap_Operations_and_Heapsort.pptx
@@ -14523,79 +14523,6 @@
           </a:graphicData>
         </a:graphic>
       </p:graphicFrame>
-      <p:sp>
-        <p:nvSpPr>
-          <p:cNvPr id="6" name="Shape 3"/>
-          <p:cNvSpPr/>
-          <p:nvPr/>
-        </p:nvSpPr>
-        <p:spPr>
-          <a:xfrm>
-            <a:off x="548640" y="5349240"/>
-            <a:ext cx="11094415" cy="594360"/>
-          </a:xfrm>
-          <a:prstGeom prst="roundRect">
-            <a:avLst>
-              <a:gd name="adj" fmla="val 9231"/>
-            </a:avLst>
-          </a:prstGeom>
-          <a:solidFill>
-            <a:srgbClr val="F5F5F5"/>
-          </a:solidFill>
-          <a:ln w="9525">
-            <a:solidFill>
-              <a:srgbClr val="D9D9D9"/>
-            </a:solidFill>
-            <a:prstDash val="solid"/>
-          </a:ln>
-        </p:spPr>
-        <p:txBody>
-          <a:bodyPr/>
-          <a:lstStyle/>
-          <a:p>
-            <a:endParaRPr lang="en-US"/>
-          </a:p>
-        </p:txBody>
-      </p:sp>
-      <p:sp>
-        <p:nvSpPr>
-          <p:cNvPr id="7" name="Text 4"/>
-          <p:cNvSpPr/>
-          <p:nvPr/>
-        </p:nvSpPr>
-        <p:spPr>
-          <a:xfrm>
-            <a:off x="777240" y="5349240"/>
-            <a:ext cx="10637215" cy="594360"/>
-          </a:xfrm>
-          <a:prstGeom prst="rect">
-            <a:avLst/>
-          </a:prstGeom>
-          <a:noFill/>
-          <a:ln/>
-        </p:spPr>
-        <p:txBody>
-          <a:bodyPr wrap="square" rtlCol="0" anchor="ctr"/>
-          <a:lstStyle/>
-          <a:p>
-            <a:pPr marL="0" indent="0" algn="l">
-              <a:buNone/>
-            </a:pPr>
-            <a:r>
-              <a:rPr lang="en-US" sz="1200" i="1" dirty="0">
-                <a:solidFill>
-                  <a:srgbClr val="595959"/>
-                </a:solidFill>
-                <a:latin typeface="Calibri" pitchFamily="34" charset="0"/>
-                <a:ea typeface="Calibri" pitchFamily="34" charset="-122"/>
-                <a:cs typeface="Calibri" pitchFamily="34" charset="-120"/>
-              </a:rPr>
-              <a:t>Suggested time: ~6 minutes. This is the same array as the start of class — a satisfying full-circle check.</a:t>
-            </a:r>
-            <a:endParaRPr lang="en-US" sz="1200" dirty="0"/>
-          </a:p>
-        </p:txBody>
-      </p:sp>
       <p:sp>
         <p:nvSpPr>
           <p:cNvPr id="8" name="Text 5"/>
